--- a/ContestSL/Presentazione_Contest.pptx
+++ b/ContestSL/Presentazione_Contest.pptx
@@ -1782,7 +1782,7 @@
         <p:spPr>
           <a:xfrm>
             <a:off x="301999" y="1462215"/>
-            <a:ext cx="3478693" cy="3139321"/>
+            <a:ext cx="3478693" cy="3600986"/>
           </a:xfrm>
           <a:prstGeom prst="rect">
             <a:avLst/>
@@ -1807,7 +1807,7 @@
               <a:defRPr/>
             </a:pPr>
             <a:r>
-              <a:rPr lang="it-IT" sz="1100" b="1" dirty="0"/>
+              <a:rPr lang="it-IT" sz="1200" b="1" dirty="0"/>
               <a:t>MDI (Inaffidabile e distorto):</a:t>
             </a:r>
           </a:p>
@@ -1824,7 +1824,7 @@
               <a:defRPr/>
             </a:pPr>
             <a:r>
-              <a:rPr lang="it-IT" sz="1100" dirty="0"/>
+              <a:rPr lang="it-IT" sz="1200" dirty="0"/>
               <a:t>F1-score mediano più basso (circa 35%).</a:t>
             </a:r>
           </a:p>
@@ -1841,7 +1841,7 @@
               <a:defRPr/>
             </a:pPr>
             <a:r>
-              <a:rPr lang="it-IT" sz="1100" dirty="0"/>
+              <a:rPr lang="it-IT" sz="1200" dirty="0"/>
               <a:t>Fortemente instabile (punti dispersi da 0% a 75%).</a:t>
             </a:r>
           </a:p>
@@ -1857,7 +1857,7 @@
               <a:buChar char="•"/>
               <a:defRPr/>
             </a:pPr>
-            <a:endParaRPr kumimoji="0" lang="it-IT" altLang="it-IT" sz="1100" b="0" i="0" u="none" strike="noStrike" kern="1200" cap="none" spc="0" normalizeH="0" baseline="0" noProof="0" dirty="0">
+            <a:endParaRPr kumimoji="0" lang="it-IT" altLang="it-IT" sz="1200" b="0" i="0" u="none" strike="noStrike" kern="1200" cap="none" spc="0" normalizeH="0" baseline="0" noProof="0" dirty="0">
               <a:ln>
                 <a:noFill/>
               </a:ln>
@@ -1885,7 +1885,7 @@
               <a:defRPr/>
             </a:pPr>
             <a:r>
-              <a:rPr lang="it-IT" sz="1100" b="1" dirty="0"/>
+              <a:rPr lang="it-IT" sz="1200" b="1" dirty="0"/>
               <a:t>MDA (Migliore ma instabile):</a:t>
             </a:r>
           </a:p>
@@ -1902,7 +1902,7 @@
               <a:defRPr/>
             </a:pPr>
             <a:r>
-              <a:rPr lang="it-IT" sz="1100" dirty="0"/>
+              <a:rPr lang="it-IT" sz="1200" dirty="0"/>
               <a:t>Netto salto predittivo con una mediana più alta (circa 60%).</a:t>
             </a:r>
           </a:p>
@@ -1919,7 +1919,7 @@
               <a:defRPr/>
             </a:pPr>
             <a:r>
-              <a:rPr lang="it-IT" sz="1100" dirty="0"/>
+              <a:rPr lang="it-IT" sz="1200" dirty="0"/>
               <a:t>Massima variabilità verticale (scatola molto ampia).</a:t>
             </a:r>
           </a:p>
@@ -1936,7 +1936,7 @@
               <a:defRPr/>
             </a:pPr>
             <a:r>
-              <a:rPr lang="it-IT" sz="1100" dirty="0"/>
+              <a:rPr lang="it-IT" sz="1200" dirty="0"/>
               <a:t>Risente della multicollinearità.</a:t>
             </a:r>
           </a:p>
@@ -1952,7 +1952,7 @@
               <a:buChar char="•"/>
               <a:defRPr/>
             </a:pPr>
-            <a:endParaRPr kumimoji="0" lang="it-IT" altLang="it-IT" sz="1100" b="0" i="0" u="none" strike="noStrike" kern="1200" cap="none" spc="0" normalizeH="0" baseline="0" noProof="0" dirty="0">
+            <a:endParaRPr kumimoji="0" lang="it-IT" altLang="it-IT" sz="1200" b="0" i="0" u="none" strike="noStrike" kern="1200" cap="none" spc="0" normalizeH="0" baseline="0" noProof="0" dirty="0">
               <a:ln>
                 <a:noFill/>
               </a:ln>
@@ -1980,19 +1980,19 @@
               <a:defRPr/>
             </a:pPr>
             <a:r>
-              <a:rPr lang="it-IT" sz="1100" b="1" dirty="0" err="1"/>
+              <a:rPr lang="it-IT" sz="1200" b="1" dirty="0" err="1"/>
               <a:t>Conditional</a:t>
             </a:r>
             <a:r>
-              <a:rPr lang="it-IT" sz="1100" b="1" dirty="0"/>
+              <a:rPr lang="it-IT" sz="1200" b="1" dirty="0"/>
               <a:t> </a:t>
             </a:r>
             <a:r>
-              <a:rPr lang="it-IT" sz="1100" b="1" dirty="0" err="1"/>
+              <a:rPr lang="it-IT" sz="1200" b="1" dirty="0" err="1"/>
               <a:t>Importance</a:t>
             </a:r>
             <a:r>
-              <a:rPr lang="it-IT" sz="1100" b="1" dirty="0"/>
+              <a:rPr lang="it-IT" sz="1200" b="1" dirty="0"/>
               <a:t>:</a:t>
             </a:r>
           </a:p>
@@ -2009,7 +2009,7 @@
               <a:defRPr/>
             </a:pPr>
             <a:r>
-              <a:rPr lang="it-IT" sz="1100" dirty="0"/>
+              <a:rPr lang="it-IT" sz="1200" dirty="0"/>
               <a:t>Garantisce la massima stabilità e consistenza.</a:t>
             </a:r>
           </a:p>
@@ -2026,10 +2026,10 @@
               <a:defRPr/>
             </a:pPr>
             <a:r>
-              <a:rPr lang="it-IT" sz="1100" dirty="0"/>
+              <a:rPr lang="it-IT" sz="1200" dirty="0"/>
               <a:t>La scatola è estremamente compatta e schiacciata sulla mediana (circa 66%): azzera i crolli verso il basso tipici di MDI e MDA.</a:t>
             </a:r>
-            <a:endParaRPr kumimoji="0" lang="it-IT" altLang="it-IT" sz="1100" b="0" i="0" u="none" strike="noStrike" kern="1200" cap="none" spc="0" normalizeH="0" baseline="0" noProof="0" dirty="0">
+            <a:endParaRPr kumimoji="0" lang="it-IT" altLang="it-IT" sz="1200" b="0" i="0" u="none" strike="noStrike" kern="1200" cap="none" spc="0" normalizeH="0" baseline="0" noProof="0" dirty="0">
               <a:ln>
                 <a:noFill/>
               </a:ln>
@@ -4723,7 +4723,7 @@
         </p:nvSpPr>
         <p:spPr>
           <a:xfrm>
-            <a:off x="151990" y="786723"/>
+            <a:off x="151990" y="906301"/>
             <a:ext cx="8992010" cy="369332"/>
           </a:xfrm>
           <a:prstGeom prst="rect">
@@ -4738,24 +4738,24 @@
           <a:lstStyle/>
           <a:p>
             <a:r>
-              <a:rPr lang="it-IT" dirty="0"/>
+              <a:rPr lang="it-IT" i="1" dirty="0"/>
               <a:t>Algoritmi </a:t>
             </a:r>
             <a:r>
-              <a:rPr lang="it-IT" dirty="0" err="1"/>
+              <a:rPr lang="it-IT" i="1" dirty="0" err="1"/>
               <a:t>Ensembled</a:t>
             </a:r>
             <a:r>
-              <a:rPr lang="it-IT" dirty="0"/>
+              <a:rPr lang="it-IT" i="1" dirty="0"/>
               <a:t>-Tree che combinano </a:t>
             </a:r>
             <a:r>
-              <a:rPr lang="it-IT" dirty="0" err="1"/>
+              <a:rPr lang="it-IT" i="1" dirty="0" err="1"/>
               <a:t>Bagging</a:t>
             </a:r>
             <a:r>
-              <a:rPr lang="it-IT" dirty="0"/>
-              <a:t> con una selezione randomica dei predittori. </a:t>
+              <a:rPr lang="it-IT" i="1" dirty="0"/>
+              <a:t> con una selezione randomica dei predittori </a:t>
             </a:r>
           </a:p>
         </p:txBody>
@@ -5186,7 +5186,7 @@
           <a:p>
             <a:r>
               <a:rPr lang="it-IT" sz="1400" dirty="0"/>
-              <a:t>Tecnica che riduce la varianza di un modello statistico creando più sotto-alberi tramite </a:t>
+              <a:t>Tecnica che genera più sotto-alberi via </a:t>
             </a:r>
             <a:r>
               <a:rPr lang="it-IT" sz="1400" b="1" dirty="0"/>
@@ -5198,11 +5198,17 @@
             </a:r>
             <a:r>
               <a:rPr lang="it-IT" sz="1400" b="1" dirty="0"/>
-              <a:t> aggregando</a:t>
+              <a:t> aggrega </a:t>
             </a:r>
             <a:r>
               <a:rPr lang="it-IT" sz="1400" dirty="0"/>
-              <a:t> i risultati per ottenere una previsione più stabile e accurata.</a:t>
+              <a:t>i risultati </a:t>
+            </a:r>
+          </a:p>
+          <a:p>
+            <a:r>
+              <a:rPr lang="it-IT" sz="1400" dirty="0"/>
+              <a:t>→ previsioni più stabili e accurate</a:t>
             </a:r>
             <a:endParaRPr lang="en-US" sz="1400" dirty="0">
               <a:ea typeface="Calibri" panose="020F0502020204030204"/>
@@ -5346,174 +5352,17 @@
             </a:r>
           </a:p>
           <a:p>
-            <a:pPr algn="l"/>
-            <a:r>
-              <a:rPr lang="en-US" sz="1400" dirty="0">
-                <a:ea typeface="Calibri" panose="020F0502020204030204"/>
-                <a:cs typeface="Calibri" panose="020F0502020204030204"/>
-              </a:rPr>
-              <a:t>Ad ogni split </a:t>
-            </a:r>
-            <a:r>
-              <a:rPr lang="en-US" sz="1400" dirty="0" err="1">
-                <a:ea typeface="Calibri" panose="020F0502020204030204"/>
-                <a:cs typeface="Calibri" panose="020F0502020204030204"/>
-              </a:rPr>
-              <a:t>ciascun</a:t>
-            </a:r>
-            <a:r>
-              <a:rPr lang="en-US" sz="1400" dirty="0">
-                <a:ea typeface="Calibri" panose="020F0502020204030204"/>
-                <a:cs typeface="Calibri" panose="020F0502020204030204"/>
-              </a:rPr>
-              <a:t> </a:t>
-            </a:r>
-            <a:r>
-              <a:rPr lang="en-US" sz="1400" dirty="0" err="1">
-                <a:ea typeface="Calibri" panose="020F0502020204030204"/>
-                <a:cs typeface="Calibri" panose="020F0502020204030204"/>
-              </a:rPr>
-              <a:t>albero</a:t>
-            </a:r>
-            <a:r>
-              <a:rPr lang="en-US" sz="1400" dirty="0">
-                <a:ea typeface="Calibri" panose="020F0502020204030204"/>
-                <a:cs typeface="Calibri" panose="020F0502020204030204"/>
-              </a:rPr>
-              <a:t> </a:t>
-            </a:r>
-            <a:r>
-              <a:rPr lang="en-US" sz="1400" dirty="0" err="1">
-                <a:ea typeface="Calibri" panose="020F0502020204030204"/>
-                <a:cs typeface="Calibri" panose="020F0502020204030204"/>
-              </a:rPr>
-              <a:t>sceglie</a:t>
-            </a:r>
-            <a:r>
-              <a:rPr lang="en-US" sz="1400" dirty="0">
-                <a:ea typeface="Calibri" panose="020F0502020204030204"/>
-                <a:cs typeface="Calibri" panose="020F0502020204030204"/>
-              </a:rPr>
-              <a:t> </a:t>
-            </a:r>
-            <a:r>
-              <a:rPr lang="en-US" sz="1400" dirty="0" err="1">
-                <a:ea typeface="Calibri" panose="020F0502020204030204"/>
-                <a:cs typeface="Calibri" panose="020F0502020204030204"/>
-              </a:rPr>
-              <a:t>casualmente</a:t>
-            </a:r>
-            <a:r>
-              <a:rPr lang="en-US" sz="1400" dirty="0">
-                <a:ea typeface="Calibri" panose="020F0502020204030204"/>
-                <a:cs typeface="Calibri" panose="020F0502020204030204"/>
-              </a:rPr>
-              <a:t> un </a:t>
-            </a:r>
-            <a:r>
-              <a:rPr lang="en-US" sz="1400" dirty="0" err="1">
-                <a:ea typeface="Calibri" panose="020F0502020204030204"/>
-                <a:cs typeface="Calibri" panose="020F0502020204030204"/>
-              </a:rPr>
-              <a:t>sottoinsieme</a:t>
-            </a:r>
-            <a:r>
-              <a:rPr lang="en-US" sz="1400" dirty="0">
-                <a:ea typeface="Calibri" panose="020F0502020204030204"/>
-                <a:cs typeface="Calibri" panose="020F0502020204030204"/>
-              </a:rPr>
-              <a:t> di </a:t>
-            </a:r>
-            <a:r>
-              <a:rPr lang="en-US" sz="1400" dirty="0" err="1">
-                <a:ea typeface="Calibri" panose="020F0502020204030204"/>
-                <a:cs typeface="Calibri" panose="020F0502020204030204"/>
-              </a:rPr>
-              <a:t>predittori</a:t>
-            </a:r>
-            <a:r>
-              <a:rPr lang="en-US" sz="1400" dirty="0">
-                <a:ea typeface="Calibri" panose="020F0502020204030204"/>
-                <a:cs typeface="Calibri" panose="020F0502020204030204"/>
-              </a:rPr>
-              <a:t> (</a:t>
-            </a:r>
-            <a:r>
-              <a:rPr lang="en-US" sz="1400" b="1" dirty="0" err="1">
-                <a:ea typeface="Calibri" panose="020F0502020204030204"/>
-                <a:cs typeface="Calibri" panose="020F0502020204030204"/>
-              </a:rPr>
+            <a:r>
+              <a:rPr lang="it-IT" sz="1400" dirty="0"/>
+              <a:t>Ogni split usa un subset casuale di predittori (</a:t>
+            </a:r>
+            <a:r>
+              <a:rPr lang="it-IT" sz="1400" b="1" dirty="0" err="1"/>
               <a:t>mtry</a:t>
             </a:r>
             <a:r>
-              <a:rPr lang="en-US" sz="1400" dirty="0">
-                <a:ea typeface="Calibri" panose="020F0502020204030204"/>
-                <a:cs typeface="Calibri" panose="020F0502020204030204"/>
-              </a:rPr>
-              <a:t>) da cui </a:t>
-            </a:r>
-            <a:r>
-              <a:rPr lang="en-US" sz="1400" dirty="0" err="1">
-                <a:ea typeface="Calibri" panose="020F0502020204030204"/>
-                <a:cs typeface="Calibri" panose="020F0502020204030204"/>
-              </a:rPr>
-              <a:t>sceglie</a:t>
-            </a:r>
-            <a:r>
-              <a:rPr lang="en-US" sz="1400" dirty="0">
-                <a:ea typeface="Calibri" panose="020F0502020204030204"/>
-                <a:cs typeface="Calibri" panose="020F0502020204030204"/>
-              </a:rPr>
-              <a:t> il </a:t>
-            </a:r>
-            <a:r>
-              <a:rPr lang="en-US" sz="1400" dirty="0" err="1">
-                <a:ea typeface="Calibri" panose="020F0502020204030204"/>
-                <a:cs typeface="Calibri" panose="020F0502020204030204"/>
-              </a:rPr>
-              <a:t>migliore</a:t>
-            </a:r>
-            <a:r>
-              <a:rPr lang="en-US" sz="1400" dirty="0">
-                <a:ea typeface="Calibri" panose="020F0502020204030204"/>
-                <a:cs typeface="Calibri" panose="020F0502020204030204"/>
-              </a:rPr>
-              <a:t> in modo da </a:t>
-            </a:r>
-            <a:r>
-              <a:rPr lang="en-US" sz="1400" dirty="0" err="1">
-                <a:ea typeface="Calibri" panose="020F0502020204030204"/>
-                <a:cs typeface="Calibri" panose="020F0502020204030204"/>
-              </a:rPr>
-              <a:t>ridurre</a:t>
-            </a:r>
-            <a:r>
-              <a:rPr lang="en-US" sz="1400" dirty="0">
-                <a:ea typeface="Calibri" panose="020F0502020204030204"/>
-                <a:cs typeface="Calibri" panose="020F0502020204030204"/>
-              </a:rPr>
-              <a:t> la </a:t>
-            </a:r>
-            <a:r>
-              <a:rPr lang="en-US" sz="1400" dirty="0" err="1">
-                <a:ea typeface="Calibri" panose="020F0502020204030204"/>
-                <a:cs typeface="Calibri" panose="020F0502020204030204"/>
-              </a:rPr>
-              <a:t>correlazione</a:t>
-            </a:r>
-            <a:r>
-              <a:rPr lang="en-US" sz="1400" dirty="0">
-                <a:ea typeface="Calibri" panose="020F0502020204030204"/>
-                <a:cs typeface="Calibri" panose="020F0502020204030204"/>
-              </a:rPr>
-              <a:t> e la </a:t>
-            </a:r>
-            <a:r>
-              <a:rPr lang="en-US" sz="1400" dirty="0" err="1">
-                <a:ea typeface="Calibri" panose="020F0502020204030204"/>
-                <a:cs typeface="Calibri" panose="020F0502020204030204"/>
-              </a:rPr>
-              <a:t>varianza</a:t>
+              <a:rPr lang="it-IT" sz="1400" dirty="0"/>
+              <a:t>) → minore correlazione e varianza</a:t>
             </a:r>
             <a:endParaRPr lang="en-US" sz="1400" dirty="0">
               <a:ea typeface="Calibri" panose="020F0502020204030204"/>
@@ -5962,7 +5811,7 @@
           <a:lstStyle/>
           <a:p>
             <a:r>
-              <a:rPr lang="it-IT" dirty="0"/>
+              <a:rPr lang="it-IT" i="1" dirty="0"/>
               <a:t>È la misura del contributo specifico di ciascun predittore nel determinare il risultato della variabile target. Identifica quali fattori guidano maggiormente le previsioni del modello.</a:t>
             </a:r>
           </a:p>
@@ -5982,7 +5831,7 @@
         </p:nvSpPr>
         <p:spPr>
           <a:xfrm>
-            <a:off x="289493" y="1710722"/>
+            <a:off x="289493" y="1548940"/>
             <a:ext cx="2816734" cy="292608"/>
           </a:xfrm>
           <a:prstGeom prst="rect">
@@ -6027,7 +5876,7 @@
         </p:nvSpPr>
         <p:spPr>
           <a:xfrm>
-            <a:off x="4510973" y="1712703"/>
+            <a:off x="4510973" y="1550921"/>
             <a:ext cx="4572560" cy="292608"/>
           </a:xfrm>
           <a:prstGeom prst="rect">
@@ -6115,8 +5964,8 @@
         </p:nvSpPr>
         <p:spPr>
           <a:xfrm>
-            <a:off x="289493" y="1984230"/>
-            <a:ext cx="855875" cy="201168"/>
+            <a:off x="289493" y="1793284"/>
+            <a:ext cx="1391596" cy="230332"/>
           </a:xfrm>
           <a:prstGeom prst="rect">
             <a:avLst/>
@@ -6132,7 +5981,7 @@
               <a:buNone/>
             </a:pPr>
             <a:r>
-              <a:rPr lang="en-US" sz="950" i="1" dirty="0">
+              <a:rPr lang="en-US" sz="1000" i="1" dirty="0">
                 <a:solidFill>
                   <a:srgbClr val="888888"/>
                 </a:solidFill>
@@ -6142,7 +5991,7 @@
               </a:rPr>
               <a:t>(Gini Importance)</a:t>
             </a:r>
-            <a:endParaRPr lang="en-US" sz="950" dirty="0"/>
+            <a:endParaRPr lang="en-US" sz="1000" dirty="0"/>
           </a:p>
         </p:txBody>
       </p:sp>
@@ -6160,7 +6009,7 @@
         </p:nvSpPr>
         <p:spPr>
           <a:xfrm>
-            <a:off x="4510973" y="1966948"/>
+            <a:off x="4510973" y="1805166"/>
             <a:ext cx="4069080" cy="201168"/>
           </a:xfrm>
           <a:prstGeom prst="rect">
@@ -6177,7 +6026,7 @@
               <a:buNone/>
             </a:pPr>
             <a:r>
-              <a:rPr lang="en-US" sz="950" i="1" dirty="0">
+              <a:rPr lang="en-US" sz="1000" i="1" dirty="0">
                 <a:solidFill>
                   <a:srgbClr val="888888"/>
                 </a:solidFill>
@@ -6187,7 +6036,7 @@
               </a:rPr>
               <a:t>(Permutation Importance)</a:t>
             </a:r>
-            <a:endParaRPr lang="en-US" sz="950" dirty="0"/>
+            <a:endParaRPr lang="en-US" sz="1000" dirty="0"/>
           </a:p>
         </p:txBody>
       </p:sp>
@@ -6205,7 +6054,7 @@
         </p:nvSpPr>
         <p:spPr>
           <a:xfrm>
-            <a:off x="289493" y="2117910"/>
+            <a:off x="289493" y="2068672"/>
             <a:ext cx="4105317" cy="778496"/>
           </a:xfrm>
           <a:prstGeom prst="rect">
@@ -6219,27 +6068,18 @@
           <a:lstStyle/>
           <a:p>
             <a:r>
-              <a:rPr lang="it-IT" sz="1000" dirty="0">
-                <a:solidFill>
-                  <a:srgbClr val="333333"/>
-                </a:solidFill>
-                <a:latin typeface="Calibri" pitchFamily="34" charset="0"/>
-                <a:ea typeface="Calibri" pitchFamily="34" charset="-122"/>
-                <a:cs typeface="Calibri" pitchFamily="34" charset="-120"/>
-              </a:rPr>
-              <a:t>Misura quanto ogni variabile contribuisce a ridurre l'impurezza </a:t>
-            </a:r>
-            <a:r>
-              <a:rPr lang="it-IT" sz="1000" dirty="0"/>
-              <a:t>all'interno dei nodi degli alberi. Per ogni variabile usata per uno split, si calcola di quanto diminuisce l'impurezza tra il nodo padre e i nodi figli. </a:t>
-            </a:r>
-          </a:p>
-          <a:p>
-            <a:r>
-              <a:rPr lang="it-IT" sz="1000" dirty="0"/>
-              <a:t>Questo valore viene sommato e mediato su tutti gli alberi della foresta.</a:t>
-            </a:r>
-            <a:endParaRPr lang="en-US" sz="1000" dirty="0"/>
+              <a:rPr lang="it-IT" sz="1200" dirty="0"/>
+              <a:t>Misura il contributo di ogni variabile alla riduzione dell’impurezza nei nodi degli alberi</a:t>
+            </a:r>
+          </a:p>
+          <a:p>
+            <a:endParaRPr lang="it-IT" sz="1000" dirty="0"/>
+          </a:p>
+          <a:p>
+            <a:r>
+              <a:rPr lang="it-IT" sz="1200" dirty="0"/>
+              <a:t>La diminuzione di impurezza viene sommata e mediata su tutta la foresta </a:t>
+            </a:r>
           </a:p>
         </p:txBody>
       </p:sp>
@@ -6412,7 +6252,13 @@
                             <a:rPr lang="it-IT" sz="1200" i="1">
                               <a:latin typeface="Cambria Math" panose="02040503050406030204" pitchFamily="18" charset="0"/>
                             </a:rPr>
-                            <m:t>=1</m:t>
+                            <m:t>=</m:t>
+                          </m:r>
+                          <m:r>
+                            <a:rPr lang="it-IT" sz="1200" i="1">
+                              <a:latin typeface="Cambria Math" panose="02040503050406030204" pitchFamily="18" charset="0"/>
+                            </a:rPr>
+                            <m:t>1</m:t>
                           </m:r>
                         </m:sub>
                         <m:sup/>
@@ -6861,7 +6707,13 @@
                             <a:rPr lang="it-IT" sz="1200" i="1">
                               <a:latin typeface="Cambria Math" panose="02040503050406030204" pitchFamily="18" charset="0"/>
                             </a:rPr>
-                            <m:t>=1</m:t>
+                            <m:t>=</m:t>
+                          </m:r>
+                          <m:r>
+                            <a:rPr lang="it-IT" sz="1200" i="1">
+                              <a:latin typeface="Cambria Math" panose="02040503050406030204" pitchFamily="18" charset="0"/>
+                            </a:rPr>
+                            <m:t>1</m:t>
                           </m:r>
                         </m:sub>
                         <m:sup>
@@ -7082,15 +6934,38 @@
           <a:lstStyle/>
           <a:p>
             <a:r>
-              <a:rPr lang="it-IT" sz="1000" dirty="0"/>
-              <a:t>Misura l'importanza di una variabile osservando quanto peggiora l’accuratezza del modello se i suoi valori Out-of-Bag (OOB) vengono mescolati casualmente.</a:t>
-            </a:r>
-          </a:p>
-          <a:p>
-            <a:r>
-              <a:rPr lang="it-IT" sz="1000" dirty="0"/>
-              <a:t>Se l'accuratezza crolla, la variabile è fondamentale; se rimane invariata, la variabile è trascurabile.</a:t>
-            </a:r>
+              <a:rPr lang="it-IT" sz="1200" dirty="0"/>
+              <a:t>Valuta l’importanza di una variabile misurando il calo di accuratezza dopo il mescolamento dei valori OOB</a:t>
+            </a:r>
+          </a:p>
+          <a:p>
+            <a:endParaRPr lang="it-IT" sz="1200" dirty="0"/>
+          </a:p>
+          <a:p>
+            <a:pPr marL="171450" indent="-171450">
+              <a:buFont typeface="Arial" panose="020B0604020202020204" pitchFamily="34" charset="0"/>
+              <a:buChar char="•"/>
+            </a:pPr>
+            <a:r>
+              <a:rPr lang="it-IT" sz="1200" dirty="0"/>
+              <a:t>Grande calo di accuratezza → variabile importante </a:t>
+            </a:r>
+          </a:p>
+          <a:p>
+            <a:pPr marL="171450" indent="-171450">
+              <a:buFont typeface="Arial" panose="020B0604020202020204" pitchFamily="34" charset="0"/>
+              <a:buChar char="•"/>
+            </a:pPr>
+            <a:r>
+              <a:rPr lang="it-IT" sz="1200" dirty="0"/>
+              <a:t>Nessun cambiamento → variabile poco rilevante </a:t>
+            </a:r>
+          </a:p>
+          <a:p>
+            <a:pPr marL="171450" indent="-171450">
+              <a:buFont typeface="Arial" panose="020B0604020202020204" pitchFamily="34" charset="0"/>
+              <a:buChar char="•"/>
+            </a:pPr>
             <a:endParaRPr lang="en-US" sz="1000" dirty="0"/>
           </a:p>
         </p:txBody>
@@ -7134,9 +7009,20 @@
                 <a:ea typeface="Calibri" pitchFamily="34" charset="-122"/>
                 <a:cs typeface="Calibri" pitchFamily="34" charset="-120"/>
               </a:rPr>
-              <a:t>✓  Vantaggi</a:t>
-            </a:r>
-            <a:endParaRPr lang="en-US" sz="1000" dirty="0"/>
+              <a:t>✓  </a:t>
+            </a:r>
+            <a:r>
+              <a:rPr lang="en-US" sz="1200" b="1" dirty="0">
+                <a:solidFill>
+                  <a:srgbClr val="2E7D32"/>
+                </a:solidFill>
+                <a:latin typeface="Calibri" pitchFamily="34" charset="0"/>
+                <a:ea typeface="Calibri" pitchFamily="34" charset="-122"/>
+                <a:cs typeface="Calibri" pitchFamily="34" charset="-120"/>
+              </a:rPr>
+              <a:t>Vantaggi</a:t>
+            </a:r>
+            <a:endParaRPr lang="en-US" sz="1200" dirty="0"/>
           </a:p>
         </p:txBody>
       </p:sp>
@@ -7171,7 +7057,7 @@
               <a:buNone/>
             </a:pPr>
             <a:r>
-              <a:rPr lang="en-US" sz="950" dirty="0">
+              <a:rPr lang="en-US" sz="1100" dirty="0">
                 <a:solidFill>
                   <a:srgbClr val="333333"/>
                 </a:solidFill>
@@ -7181,7 +7067,7 @@
               </a:rPr>
               <a:t>Calcolata a costo zero durante il training, non richiede dati aggiuntivi.</a:t>
             </a:r>
-            <a:endParaRPr lang="en-US" sz="950" dirty="0"/>
+            <a:endParaRPr lang="en-US" sz="1100" dirty="0"/>
           </a:p>
         </p:txBody>
       </p:sp>
@@ -7216,7 +7102,7 @@
               <a:buNone/>
             </a:pPr>
             <a:r>
-              <a:rPr lang="en-US" sz="1000" b="1" dirty="0">
+              <a:rPr lang="en-US" sz="1200" b="1" dirty="0">
                 <a:solidFill>
                   <a:srgbClr val="C62828"/>
                 </a:solidFill>
@@ -7226,7 +7112,7 @@
               </a:rPr>
               <a:t>✗  Problema fondamentale</a:t>
             </a:r>
-            <a:endParaRPr lang="en-US" sz="1000" dirty="0"/>
+            <a:endParaRPr lang="en-US" sz="1200" dirty="0"/>
           </a:p>
         </p:txBody>
       </p:sp>
@@ -7244,7 +7130,7 @@
         </p:nvSpPr>
         <p:spPr>
           <a:xfrm>
-            <a:off x="426653" y="4324231"/>
+            <a:off x="426653" y="4345333"/>
             <a:ext cx="4031556" cy="228600"/>
           </a:xfrm>
           <a:prstGeom prst="rect">
@@ -7261,7 +7147,7 @@
               <a:buNone/>
             </a:pPr>
             <a:r>
-              <a:rPr lang="en-US" sz="950" dirty="0">
+              <a:rPr lang="en-US" sz="1100" dirty="0">
                 <a:solidFill>
                   <a:srgbClr val="333333"/>
                 </a:solidFill>
@@ -7272,7 +7158,7 @@
               <a:t>Bias sistematico verso variabili ad </a:t>
             </a:r>
             <a:r>
-              <a:rPr lang="en-US" sz="950" dirty="0" err="1">
+              <a:rPr lang="en-US" sz="1100" dirty="0" err="1">
                 <a:solidFill>
                   <a:srgbClr val="333333"/>
                 </a:solidFill>
@@ -7283,7 +7169,7 @@
               <a:t>alta</a:t>
             </a:r>
             <a:r>
-              <a:rPr lang="en-US" sz="950" dirty="0">
+              <a:rPr lang="en-US" sz="1100" dirty="0">
                 <a:solidFill>
                   <a:srgbClr val="333333"/>
                 </a:solidFill>
@@ -7294,7 +7180,7 @@
               <a:t> </a:t>
             </a:r>
             <a:r>
-              <a:rPr lang="en-US" sz="950" dirty="0" err="1">
+              <a:rPr lang="en-US" sz="1100" dirty="0" err="1">
                 <a:solidFill>
                   <a:srgbClr val="333333"/>
                 </a:solidFill>
@@ -7305,7 +7191,7 @@
               <a:t>cardinalità</a:t>
             </a:r>
             <a:r>
-              <a:rPr lang="en-US" sz="950" dirty="0">
+              <a:rPr lang="en-US" sz="1100" dirty="0">
                 <a:solidFill>
                   <a:srgbClr val="333333"/>
                 </a:solidFill>
@@ -7315,7 +7201,7 @@
               </a:rPr>
               <a:t>, E[MDI(Xⱼ)] &gt; 0 anche se Xⱼ ⊥ Y.</a:t>
             </a:r>
-            <a:endParaRPr lang="en-US" sz="950" dirty="0"/>
+            <a:endParaRPr lang="en-US" sz="1100" dirty="0"/>
           </a:p>
         </p:txBody>
       </p:sp>
@@ -7333,7 +7219,7 @@
         </p:nvSpPr>
         <p:spPr>
           <a:xfrm>
-            <a:off x="426653" y="4571119"/>
+            <a:off x="426653" y="4697731"/>
             <a:ext cx="4031556" cy="228600"/>
           </a:xfrm>
           <a:prstGeom prst="rect">
@@ -7350,7 +7236,7 @@
               <a:buNone/>
             </a:pPr>
             <a:r>
-              <a:rPr lang="en-US" sz="950" dirty="0">
+              <a:rPr lang="en-US" sz="1100" dirty="0">
                 <a:solidFill>
                   <a:srgbClr val="333333"/>
                 </a:solidFill>
@@ -7360,7 +7246,7 @@
               </a:rPr>
               <a:t>Il bias cresce col numero di valori distinti, indipendentemente dalla rilevanza reale.</a:t>
             </a:r>
-            <a:endParaRPr lang="en-US" sz="950" dirty="0"/>
+            <a:endParaRPr lang="en-US" sz="1100" dirty="0"/>
           </a:p>
         </p:txBody>
       </p:sp>
@@ -7395,7 +7281,7 @@
               <a:buNone/>
             </a:pPr>
             <a:r>
-              <a:rPr lang="en-US" sz="950" b="1" dirty="0">
+              <a:rPr lang="en-US" sz="1200" b="1" dirty="0">
                 <a:solidFill>
                   <a:srgbClr val="2E7D32"/>
                 </a:solidFill>
@@ -7406,7 +7292,7 @@
               <a:t>✓</a:t>
             </a:r>
             <a:r>
-              <a:rPr lang="en-US" sz="950" dirty="0">
+              <a:rPr lang="en-US" sz="1200" dirty="0">
                 <a:solidFill>
                   <a:srgbClr val="2E7D32"/>
                 </a:solidFill>
@@ -7417,7 +7303,7 @@
               <a:t>  </a:t>
             </a:r>
             <a:r>
-              <a:rPr lang="en-US" sz="950" b="1" dirty="0">
+              <a:rPr lang="en-US" sz="1200" b="1" dirty="0">
                 <a:solidFill>
                   <a:srgbClr val="2E7D32"/>
                 </a:solidFill>
@@ -7427,7 +7313,7 @@
               </a:rPr>
               <a:t>Meno sensibile alla cardinalità rispetto alla MDI</a:t>
             </a:r>
-            <a:endParaRPr lang="en-US" sz="950" b="1" dirty="0"/>
+            <a:endParaRPr lang="en-US" sz="1200" b="1" dirty="0"/>
           </a:p>
         </p:txBody>
       </p:sp>
@@ -7445,7 +7331,7 @@
         </p:nvSpPr>
         <p:spPr>
           <a:xfrm>
-            <a:off x="4524994" y="3974211"/>
+            <a:off x="4537806" y="4063378"/>
             <a:ext cx="4069080" cy="201168"/>
           </a:xfrm>
           <a:prstGeom prst="rect">
@@ -7462,7 +7348,7 @@
               <a:buNone/>
             </a:pPr>
             <a:r>
-              <a:rPr lang="en-US" sz="1000" b="1" dirty="0">
+              <a:rPr lang="en-US" sz="1200" b="1" dirty="0">
                 <a:solidFill>
                   <a:srgbClr val="C62828"/>
                 </a:solidFill>
@@ -7473,7 +7359,7 @@
               <a:t>✗  </a:t>
             </a:r>
             <a:r>
-              <a:rPr lang="en-US" sz="1000" b="1" dirty="0" err="1">
+              <a:rPr lang="en-US" sz="1200" b="1" dirty="0" err="1">
                 <a:solidFill>
                   <a:srgbClr val="C62828"/>
                 </a:solidFill>
@@ -7483,7 +7369,7 @@
               </a:rPr>
               <a:t>Limitazioni</a:t>
             </a:r>
-            <a:endParaRPr lang="en-US" sz="1000" dirty="0"/>
+            <a:endParaRPr lang="en-US" sz="1200" dirty="0"/>
           </a:p>
         </p:txBody>
       </p:sp>
@@ -7501,7 +7387,7 @@
         </p:nvSpPr>
         <p:spPr>
           <a:xfrm>
-            <a:off x="4662153" y="4193667"/>
+            <a:off x="4662153" y="4315087"/>
             <a:ext cx="4009871" cy="228600"/>
           </a:xfrm>
           <a:prstGeom prst="rect">
@@ -7518,7 +7404,7 @@
               <a:buNone/>
             </a:pPr>
             <a:r>
-              <a:rPr lang="en-US" sz="950" dirty="0">
+              <a:rPr lang="en-US" sz="1100" dirty="0">
                 <a:solidFill>
                   <a:srgbClr val="333333"/>
                 </a:solidFill>
@@ -7529,7 +7415,7 @@
               <a:t>Con variabili correlate </a:t>
             </a:r>
             <a:r>
-              <a:rPr lang="en-US" sz="950" dirty="0" err="1">
+              <a:rPr lang="en-US" sz="1100" dirty="0" err="1">
                 <a:solidFill>
                   <a:srgbClr val="333333"/>
                 </a:solidFill>
@@ -7540,7 +7426,7 @@
               <a:t>distribuisce</a:t>
             </a:r>
             <a:r>
-              <a:rPr lang="en-US" sz="950" dirty="0">
+              <a:rPr lang="en-US" sz="1100" dirty="0">
                 <a:solidFill>
                   <a:srgbClr val="333333"/>
                 </a:solidFill>
@@ -7551,7 +7437,7 @@
               <a:t> </a:t>
             </a:r>
             <a:r>
-              <a:rPr lang="en-US" sz="950" dirty="0" err="1">
+              <a:rPr lang="en-US" sz="1100" dirty="0" err="1">
                 <a:solidFill>
                   <a:srgbClr val="333333"/>
                 </a:solidFill>
@@ -7562,7 +7448,7 @@
               <a:t>l’importanza</a:t>
             </a:r>
             <a:r>
-              <a:rPr lang="en-US" sz="950" dirty="0">
+              <a:rPr lang="en-US" sz="1100" dirty="0">
                 <a:solidFill>
                   <a:srgbClr val="333333"/>
                 </a:solidFill>
@@ -7572,7 +7458,7 @@
               </a:rPr>
               <a:t> arbitrariamente tra variabili simili.</a:t>
             </a:r>
-            <a:endParaRPr lang="en-US" sz="950" dirty="0"/>
+            <a:endParaRPr lang="en-US" sz="1100" dirty="0"/>
           </a:p>
         </p:txBody>
       </p:sp>
@@ -7590,7 +7476,7 @@
         </p:nvSpPr>
         <p:spPr>
           <a:xfrm>
-            <a:off x="4658677" y="4399805"/>
+            <a:off x="4662154" y="4582314"/>
             <a:ext cx="3931920" cy="228600"/>
           </a:xfrm>
           <a:prstGeom prst="rect">
@@ -7607,7 +7493,7 @@
               <a:buNone/>
             </a:pPr>
             <a:r>
-              <a:rPr lang="it-IT" sz="950" dirty="0">
+              <a:rPr lang="it-IT" sz="1100" dirty="0">
                 <a:solidFill>
                   <a:srgbClr val="333333"/>
                 </a:solidFill>
@@ -7617,7 +7503,7 @@
               </a:rPr>
               <a:t>È più lento da calcolare.</a:t>
             </a:r>
-            <a:endParaRPr lang="en-US" sz="950" dirty="0"/>
+            <a:endParaRPr lang="en-US" sz="1100" dirty="0"/>
           </a:p>
         </p:txBody>
       </p:sp>
@@ -10477,33 +10363,33 @@
           <a:lstStyle/>
           <a:p>
             <a:r>
-              <a:rPr lang="it-IT" sz="1400" b="1" dirty="0"/>
+              <a:rPr lang="it-IT" sz="1400" b="1" i="1" dirty="0"/>
               <a:t>Estensione della MDA </a:t>
             </a:r>
             <a:r>
-              <a:rPr lang="it-IT" sz="1400" dirty="0"/>
+              <a:rPr lang="it-IT" sz="1400" i="1" dirty="0"/>
               <a:t>che permuta Xⱼ rispetto alla sua distribuzione </a:t>
             </a:r>
             <a:r>
-              <a:rPr lang="it-IT" sz="1400" b="1" dirty="0"/>
+              <a:rPr lang="it-IT" sz="1400" b="1" i="1" dirty="0"/>
               <a:t>condizionale Xⱼ | Z</a:t>
             </a:r>
             <a:r>
-              <a:rPr lang="it-IT" sz="1400" dirty="0"/>
+              <a:rPr lang="it-IT" sz="1400" i="1" dirty="0"/>
               <a:t>, anziché rispetto alla distribuzione marginale.</a:t>
             </a:r>
           </a:p>
           <a:p>
             <a:r>
-              <a:rPr lang="it-IT" sz="1400" dirty="0"/>
+              <a:rPr lang="it-IT" sz="1400" i="1" dirty="0"/>
               <a:t>In questo modo isola il </a:t>
             </a:r>
             <a:r>
-              <a:rPr lang="it-IT" sz="1400" b="1" dirty="0"/>
+              <a:rPr lang="it-IT" sz="1400" b="1" i="1" dirty="0"/>
               <a:t>contributo unico </a:t>
             </a:r>
             <a:r>
-              <a:rPr lang="it-IT" sz="1400" dirty="0"/>
+              <a:rPr lang="it-IT" sz="1400" i="1" dirty="0"/>
               <a:t>di Xⱼ al netto delle variabili correlate Z.</a:t>
             </a:r>
           </a:p>
@@ -10634,86 +10520,168 @@
           </a:p>
         </p:txBody>
       </p:sp>
-      <p:sp>
-        <p:nvSpPr>
-          <p:cNvPr id="25" name="CasellaDiTesto 24">
-            <a:extLst>
-              <a:ext uri="{FF2B5EF4-FFF2-40B4-BE49-F238E27FC236}">
-                <a16:creationId xmlns:a16="http://schemas.microsoft.com/office/drawing/2014/main" id="{540AF6F8-4D41-896C-8BF6-0B9B70D3BBDA}"/>
-              </a:ext>
-            </a:extLst>
-          </p:cNvPr>
-          <p:cNvSpPr txBox="1"/>
-          <p:nvPr/>
-        </p:nvSpPr>
-        <p:spPr>
-          <a:xfrm>
-            <a:off x="390090" y="2191053"/>
-            <a:ext cx="3808412" cy="1661993"/>
-          </a:xfrm>
-          <a:prstGeom prst="rect">
-            <a:avLst/>
-          </a:prstGeom>
-          <a:noFill/>
-        </p:spPr>
-        <p:txBody>
-          <a:bodyPr wrap="square" rtlCol="0">
-            <a:spAutoFit/>
-          </a:bodyPr>
-          <a:lstStyle/>
-          <a:p>
-            <a:r>
-              <a:rPr lang="it-IT" sz="1400" dirty="0"/>
-              <a:t>Le </a:t>
-            </a:r>
-            <a:r>
-              <a:rPr lang="it-IT" sz="1400" b="1" dirty="0"/>
-              <a:t>osservazioni OOB </a:t>
-            </a:r>
-            <a:r>
-              <a:rPr lang="it-IT" sz="1400" dirty="0"/>
-              <a:t>vengono partizionate in base ai valori delle variabili </a:t>
-            </a:r>
-            <a:r>
-              <a:rPr lang="it-IT" sz="1400" b="1" dirty="0"/>
-              <a:t>correlate Z</a:t>
-            </a:r>
-            <a:r>
-              <a:rPr lang="it-IT" sz="1400" dirty="0"/>
-              <a:t> (sfrutta la struttura degli alberi). </a:t>
-            </a:r>
-          </a:p>
-          <a:p>
-            <a:r>
-              <a:rPr lang="it-IT" sz="1400" b="1" dirty="0"/>
-              <a:t>Xⱼ</a:t>
-            </a:r>
-            <a:r>
-              <a:rPr lang="it-IT" sz="1400" dirty="0"/>
-              <a:t> viene poi permutata esclusivamente all'interno di </a:t>
-            </a:r>
-            <a:r>
-              <a:rPr lang="it-IT" sz="1400" b="1" dirty="0"/>
-              <a:t>ciascun gruppo</a:t>
-            </a:r>
-            <a:r>
-              <a:rPr lang="it-IT" sz="1400" dirty="0"/>
-              <a:t>, preservando così la reale </a:t>
-            </a:r>
-            <a:r>
-              <a:rPr lang="it-IT" sz="1400" b="1" dirty="0"/>
-              <a:t>struttura di dipendenza</a:t>
-            </a:r>
-            <a:r>
-              <a:rPr lang="it-IT" sz="1400" dirty="0"/>
-              <a:t>.</a:t>
-            </a:r>
-          </a:p>
-          <a:p>
-            <a:endParaRPr lang="it-IT" dirty="0"/>
-          </a:p>
-        </p:txBody>
-      </p:sp>
+      <mc:AlternateContent xmlns:mc="http://schemas.openxmlformats.org/markup-compatibility/2006">
+        <mc:Choice xmlns:a14="http://schemas.microsoft.com/office/drawing/2010/main" Requires="a14">
+          <p:sp>
+            <p:nvSpPr>
+              <p:cNvPr id="25" name="CasellaDiTesto 24">
+                <a:extLst>
+                  <a:ext uri="{FF2B5EF4-FFF2-40B4-BE49-F238E27FC236}">
+                    <a16:creationId xmlns:a16="http://schemas.microsoft.com/office/drawing/2014/main" id="{540AF6F8-4D41-896C-8BF6-0B9B70D3BBDA}"/>
+                  </a:ext>
+                </a:extLst>
+              </p:cNvPr>
+              <p:cNvSpPr txBox="1"/>
+              <p:nvPr/>
+            </p:nvSpPr>
+            <p:spPr>
+              <a:xfrm>
+                <a:off x="390090" y="2191053"/>
+                <a:ext cx="3808412" cy="1402307"/>
+              </a:xfrm>
+              <a:prstGeom prst="rect">
+                <a:avLst/>
+              </a:prstGeom>
+              <a:noFill/>
+            </p:spPr>
+            <p:txBody>
+              <a:bodyPr wrap="square" rtlCol="0">
+                <a:spAutoFit/>
+              </a:bodyPr>
+              <a:lstStyle/>
+              <a:p>
+                <a:pPr marL="171450" indent="-171450">
+                  <a:buFont typeface="Arial" panose="020B0604020202020204" pitchFamily="34" charset="0"/>
+                  <a:buChar char="•"/>
+                </a:pPr>
+                <a:r>
+                  <a:rPr lang="it-IT" sz="1400" dirty="0"/>
+                  <a:t>Le </a:t>
+                </a:r>
+                <a:r>
+                  <a:rPr lang="it-IT" sz="1400" b="1" dirty="0"/>
+                  <a:t>osservazioni OOB </a:t>
+                </a:r>
+                <a:r>
+                  <a:rPr lang="it-IT" sz="1400" dirty="0"/>
+                  <a:t>vengono raggruppate in base alle variabili </a:t>
+                </a:r>
+                <a:r>
+                  <a:rPr lang="it-IT" sz="1400" b="1" dirty="0"/>
+                  <a:t>correlate Z</a:t>
+                </a:r>
+                <a:r>
+                  <a:rPr lang="it-IT" sz="1400" dirty="0"/>
+                  <a:t> </a:t>
+                </a:r>
+              </a:p>
+              <a:p>
+                <a:r>
+                  <a:rPr lang="it-IT" sz="1400" dirty="0"/>
+                  <a:t> </a:t>
+                </a:r>
+              </a:p>
+              <a:p>
+                <a:pPr marL="171450" indent="-171450">
+                  <a:buFont typeface="Arial" panose="020B0604020202020204" pitchFamily="34" charset="0"/>
+                  <a:buChar char="•"/>
+                </a:pPr>
+                <a:r>
+                  <a:rPr lang="it-IT" sz="1400" dirty="0"/>
+                  <a:t>La variabile </a:t>
+                </a:r>
+                <a14:m>
+                  <m:oMath xmlns:m="http://schemas.openxmlformats.org/officeDocument/2006/math">
+                    <m:sSub>
+                      <m:sSubPr>
+                        <m:ctrlPr>
+                          <a:rPr lang="ar-AE" sz="1400" b="1"/>
+                        </m:ctrlPr>
+                      </m:sSubPr>
+                      <m:e>
+                        <m:r>
+                          <a:rPr lang="ar-AE" sz="1400" b="1" i="1"/>
+                          <m:t>𝑿</m:t>
+                        </m:r>
+                      </m:e>
+                      <m:sub>
+                        <m:r>
+                          <a:rPr lang="ar-AE" sz="1400" b="1" i="1"/>
+                          <m:t>𝒋</m:t>
+                        </m:r>
+                      </m:sub>
+                    </m:sSub>
+                  </m:oMath>
+                </a14:m>
+                <a:r>
+                  <a:rPr lang="it-IT" sz="1400" dirty="0"/>
+                  <a:t> viene permutata all’interno di </a:t>
+                </a:r>
+                <a:r>
+                  <a:rPr lang="it-IT" sz="1400" b="1" dirty="0"/>
+                  <a:t>ciascun gruppo</a:t>
+                </a:r>
+                <a:r>
+                  <a:rPr lang="it-IT" sz="1400" dirty="0"/>
+                  <a:t>, mantenendo la </a:t>
+                </a:r>
+                <a:r>
+                  <a:rPr lang="it-IT" sz="1400" b="1" dirty="0"/>
+                  <a:t>dipendenza</a:t>
+                </a:r>
+                <a:r>
+                  <a:rPr lang="it-IT" sz="1400" dirty="0"/>
+                  <a:t> tra variabili</a:t>
+                </a:r>
+              </a:p>
+            </p:txBody>
+          </p:sp>
+        </mc:Choice>
+        <mc:Fallback>
+          <p:sp>
+            <p:nvSpPr>
+              <p:cNvPr id="25" name="CasellaDiTesto 24">
+                <a:extLst>
+                  <a:ext uri="{FF2B5EF4-FFF2-40B4-BE49-F238E27FC236}">
+                    <a16:creationId xmlns:a16="http://schemas.microsoft.com/office/drawing/2014/main" id="{540AF6F8-4D41-896C-8BF6-0B9B70D3BBDA}"/>
+                  </a:ext>
+                </a:extLst>
+              </p:cNvPr>
+              <p:cNvSpPr txBox="1">
+                <a:spLocks noRot="1" noChangeAspect="1" noMove="1" noResize="1" noEditPoints="1" noAdjustHandles="1" noChangeArrowheads="1" noChangeShapeType="1" noTextEdit="1"/>
+              </p:cNvSpPr>
+              <p:nvPr/>
+            </p:nvSpPr>
+            <p:spPr>
+              <a:xfrm>
+                <a:off x="390090" y="2191053"/>
+                <a:ext cx="3808412" cy="1402307"/>
+              </a:xfrm>
+              <a:prstGeom prst="rect">
+                <a:avLst/>
+              </a:prstGeom>
+              <a:blipFill>
+                <a:blip r:embed="rId3"/>
+                <a:stretch>
+                  <a:fillRect l="-320" t="-435" r="-800" b="-4348"/>
+                </a:stretch>
+              </a:blipFill>
+            </p:spPr>
+            <p:txBody>
+              <a:bodyPr/>
+              <a:lstStyle/>
+              <a:p>
+                <a:r>
+                  <a:rPr lang="it-IT">
+                    <a:noFill/>
+                  </a:rPr>
+                  <a:t> </a:t>
+                </a:r>
+              </a:p>
+            </p:txBody>
+          </p:sp>
+        </mc:Fallback>
+      </mc:AlternateContent>
       <p:sp>
         <p:nvSpPr>
           <p:cNvPr id="26" name="Shape 6">
@@ -10885,7 +10853,13 @@
                             <a:rPr lang="it-IT" sz="1200" i="1">
                               <a:latin typeface="Cambria Math" panose="02040503050406030204" pitchFamily="18" charset="0"/>
                             </a:rPr>
-                            <m:t>=1</m:t>
+                            <m:t>=</m:t>
+                          </m:r>
+                          <m:r>
+                            <a:rPr lang="it-IT" sz="1200" i="1">
+                              <a:latin typeface="Cambria Math" panose="02040503050406030204" pitchFamily="18" charset="0"/>
+                            </a:rPr>
+                            <m:t>1</m:t>
                           </m:r>
                         </m:sub>
                         <m:sup>
@@ -11113,7 +11087,7 @@
                 <a:avLst/>
               </a:prstGeom>
               <a:blipFill>
-                <a:blip r:embed="rId3"/>
+                <a:blip r:embed="rId4"/>
                 <a:stretch>
                   <a:fillRect/>
                 </a:stretch>
@@ -11417,7 +11391,7 @@
                 <a:avLst/>
               </a:prstGeom>
               <a:blipFill>
-                <a:blip r:embed="rId4"/>
+                <a:blip r:embed="rId5"/>
                 <a:stretch>
                   <a:fillRect b="-1961"/>
                 </a:stretch>
@@ -11571,7 +11545,7 @@
             </a:r>
             <a:r>
               <a:rPr lang="it-IT" sz="1400" dirty="0"/>
-              <a:t> da cardinalità a livello di splitting. </a:t>
+              <a:t> da cardinalità a livello di splitting </a:t>
             </a:r>
           </a:p>
           <a:p>
@@ -12992,23 +12966,6 @@
 </file>
 
 <file path=customXml/item1.xml><?xml version="1.0" encoding="utf-8"?>
-<p:properties xmlns:p="http://schemas.microsoft.com/office/2006/metadata/properties" xmlns:xsi="http://www.w3.org/2001/XMLSchema-instance" xmlns:pc="http://schemas.microsoft.com/office/infopath/2007/PartnerControls">
-  <documentManagement>
-    <_activity xmlns="df5b7411-0bd9-441c-a587-7944a4ab8ce9" xsi:nil="true"/>
-  </documentManagement>
-</p:properties>
-</file>
-
-<file path=customXml/item2.xml><?xml version="1.0" encoding="utf-8"?>
-<?mso-contentType ?>
-<FormTemplates xmlns="http://schemas.microsoft.com/sharepoint/v3/contenttype/forms">
-  <Display>DocumentLibraryForm</Display>
-  <Edit>DocumentLibraryForm</Edit>
-  <New>DocumentLibraryForm</New>
-</FormTemplates>
-</file>
-
-<file path=customXml/item3.xml><?xml version="1.0" encoding="utf-8"?>
 <ct:contentTypeSchema xmlns:ct="http://schemas.microsoft.com/office/2006/metadata/contentType" xmlns:ma="http://schemas.microsoft.com/office/2006/metadata/properties/metaAttributes" ct:_="" ma:_="" ma:contentTypeName="Document" ma:contentTypeID="0x010100FFCD87CF2A8CCE46999F14E89D2397A7" ma:contentTypeVersion="9" ma:contentTypeDescription="Create a new document." ma:contentTypeScope="" ma:versionID="04c6c9a53cca2dc0747056af3e59128d">
   <xsd:schema xmlns:xsd="http://www.w3.org/2001/XMLSchema" xmlns:xs="http://www.w3.org/2001/XMLSchema" xmlns:p="http://schemas.microsoft.com/office/2006/metadata/properties" xmlns:ns3="df5b7411-0bd9-441c-a587-7944a4ab8ce9" targetNamespace="http://schemas.microsoft.com/office/2006/metadata/properties" ma:root="true" ma:fieldsID="a84b1cfebefeb2fc1e8a376aeec60261" ns3:_="">
     <xsd:import namespace="df5b7411-0bd9-441c-a587-7944a4ab8ce9"/>
@@ -13182,31 +13139,24 @@
 </ct:contentTypeSchema>
 </file>
 
-<file path=customXml/itemProps1.xml><?xml version="1.0" encoding="utf-8"?>
-<ds:datastoreItem xmlns:ds="http://schemas.openxmlformats.org/officeDocument/2006/customXml" ds:itemID="{B3AD13D0-A941-4301-90CA-BF751F48A029}">
-  <ds:schemaRefs>
-    <ds:schemaRef ds:uri="http://purl.org/dc/dcmitype/"/>
-    <ds:schemaRef ds:uri="http://schemas.microsoft.com/office/infopath/2007/PartnerControls"/>
-    <ds:schemaRef ds:uri="http://schemas.microsoft.com/office/2006/documentManagement/types"/>
-    <ds:schemaRef ds:uri="df5b7411-0bd9-441c-a587-7944a4ab8ce9"/>
-    <ds:schemaRef ds:uri="http://www.w3.org/XML/1998/namespace"/>
-    <ds:schemaRef ds:uri="http://purl.org/dc/terms/"/>
-    <ds:schemaRef ds:uri="http://schemas.openxmlformats.org/package/2006/metadata/core-properties"/>
-    <ds:schemaRef ds:uri="http://schemas.microsoft.com/office/2006/metadata/properties"/>
-    <ds:schemaRef ds:uri="http://purl.org/dc/elements/1.1/"/>
-  </ds:schemaRefs>
-</ds:datastoreItem>
+<file path=customXml/item2.xml><?xml version="1.0" encoding="utf-8"?>
+<?mso-contentType ?>
+<FormTemplates xmlns="http://schemas.microsoft.com/sharepoint/v3/contenttype/forms">
+  <Display>DocumentLibraryForm</Display>
+  <Edit>DocumentLibraryForm</Edit>
+  <New>DocumentLibraryForm</New>
+</FormTemplates>
 </file>
 
-<file path=customXml/itemProps2.xml><?xml version="1.0" encoding="utf-8"?>
-<ds:datastoreItem xmlns:ds="http://schemas.openxmlformats.org/officeDocument/2006/customXml" ds:itemID="{5F6E7083-04CE-4148-8822-E3F79A2926B6}">
-  <ds:schemaRefs>
-    <ds:schemaRef ds:uri="http://schemas.microsoft.com/sharepoint/v3/contenttype/forms"/>
-  </ds:schemaRefs>
-</ds:datastoreItem>
+<file path=customXml/item3.xml><?xml version="1.0" encoding="utf-8"?>
+<p:properties xmlns:p="http://schemas.microsoft.com/office/2006/metadata/properties" xmlns:xsi="http://www.w3.org/2001/XMLSchema-instance" xmlns:pc="http://schemas.microsoft.com/office/infopath/2007/PartnerControls">
+  <documentManagement>
+    <_activity xmlns="df5b7411-0bd9-441c-a587-7944a4ab8ce9" xsi:nil="true"/>
+  </documentManagement>
+</p:properties>
 </file>
 
-<file path=customXml/itemProps3.xml><?xml version="1.0" encoding="utf-8"?>
+<file path=customXml/itemProps1.xml><?xml version="1.0" encoding="utf-8"?>
 <ds:datastoreItem xmlns:ds="http://schemas.openxmlformats.org/officeDocument/2006/customXml" ds:itemID="{86BD5B09-5F77-4A89-B4D1-408124348631}">
   <ds:schemaRefs>
     <ds:schemaRef ds:uri="http://schemas.microsoft.com/office/2006/metadata/contentType"/>
@@ -13222,4 +13172,28 @@
     <ds:schemaRef ds:uri="http://schemas.microsoft.com/internal/obd"/>
   </ds:schemaRefs>
 </ds:datastoreItem>
+</file>
+
+<file path=customXml/itemProps2.xml><?xml version="1.0" encoding="utf-8"?>
+<ds:datastoreItem xmlns:ds="http://schemas.openxmlformats.org/officeDocument/2006/customXml" ds:itemID="{5F6E7083-04CE-4148-8822-E3F79A2926B6}">
+  <ds:schemaRefs>
+    <ds:schemaRef ds:uri="http://schemas.microsoft.com/sharepoint/v3/contenttype/forms"/>
+  </ds:schemaRefs>
+</ds:datastoreItem>
+</file>
+
+<file path=customXml/itemProps3.xml><?xml version="1.0" encoding="utf-8"?>
+<ds:datastoreItem xmlns:ds="http://schemas.openxmlformats.org/officeDocument/2006/customXml" ds:itemID="{B3AD13D0-A941-4301-90CA-BF751F48A029}">
+  <ds:schemaRefs>
+    <ds:schemaRef ds:uri="http://purl.org/dc/dcmitype/"/>
+    <ds:schemaRef ds:uri="http://schemas.microsoft.com/office/infopath/2007/PartnerControls"/>
+    <ds:schemaRef ds:uri="http://schemas.microsoft.com/office/2006/documentManagement/types"/>
+    <ds:schemaRef ds:uri="df5b7411-0bd9-441c-a587-7944a4ab8ce9"/>
+    <ds:schemaRef ds:uri="http://www.w3.org/XML/1998/namespace"/>
+    <ds:schemaRef ds:uri="http://purl.org/dc/terms/"/>
+    <ds:schemaRef ds:uri="http://schemas.openxmlformats.org/package/2006/metadata/core-properties"/>
+    <ds:schemaRef ds:uri="http://schemas.microsoft.com/office/2006/metadata/properties"/>
+    <ds:schemaRef ds:uri="http://purl.org/dc/elements/1.1/"/>
+  </ds:schemaRefs>
+</ds:datastoreItem>
 </file>